--- a/output/pptx/ocean-layout-catalog.pptx
+++ b/output/pptx/ocean-layout-catalog.pptx
@@ -12,9 +12,10 @@
     <p:sldId id="260" r:id="rId6"/>
     <p:sldId id="261" r:id="rId7"/>
     <p:sldId id="262" r:id="rId8"/>
+    <p:sldId id="263" r:id="rId9"/>
   </p:sldIdLst>
   <p:notesMasterIdLst>
-    <p:notesMasterId r:id="rId9"/>
+    <p:notesMasterId r:id="rId10"/>
   </p:notesMasterIdLst>
   <p:sldSz cx="12191695" cy="6858000"/>
   <p:notesSz cx="6858000" cy="12191695"/>
@@ -948,7 +949,7 @@
           <a:p>
             <a:r>
               <a:rPr lang="en-US" dirty="0"/>
-              <a:t/>
+              <a:t>Ocean voice, Guide 06</a:t>
             </a:r>
             <a:endParaRPr lang="en-US" dirty="0"/>
           </a:p>
@@ -1060,6 +1061,94 @@
             <a:fld id="{F7021451-1387-4CA6-816F-3879F97B5CBC}" type="slidenum">
               <a:rPr lang="en-US"/>
               <a:t>7</a:t>
+            </a:fld>
+            <a:endParaRPr lang="en-US"/>
+          </a:p>
+        </p:txBody>
+      </p:sp>
+    </p:spTree>
+    <p:extLst>
+      <p:ext uri="{BB962C8B-B14F-4D97-AF65-F5344CB8AC3E}">
+        <p14:creationId xmlns:p14="http://schemas.microsoft.com/office/powerpoint/2010/main" val="1024086991"/>
+      </p:ext>
+    </p:extLst>
+  </p:cSld>
+  <p:clrMapOvr>
+    <a:masterClrMapping/>
+  </p:clrMapOvr>
+</p:notes>
+</file>
+
+<file path=ppt/notesSlides/notesSlide8.xml><?xml version="1.0" encoding="utf-8"?>
+<p:notes xmlns:a="http://schemas.openxmlformats.org/drawingml/2006/main" xmlns:r="http://schemas.openxmlformats.org/officeDocument/2006/relationships" xmlns:p="http://schemas.openxmlformats.org/presentationml/2006/main">
+  <p:cSld>
+    <p:spTree>
+      <p:nvGrpSpPr>
+        <p:cNvPr id="1" name=""/>
+        <p:cNvGrpSpPr/>
+        <p:nvPr/>
+      </p:nvGrpSpPr>
+      <p:grpSpPr>
+        <a:xfrm>
+          <a:off x="0" y="0"/>
+          <a:ext cx="0" cy="0"/>
+          <a:chOff x="0" y="0"/>
+          <a:chExt cx="0" cy="0"/>
+        </a:xfrm>
+      </p:grpSpPr>
+      <p:sp>
+        <p:nvSpPr>
+          <p:cNvPr id="2" name="Slide Image Placeholder 1"/>
+          <p:cNvSpPr>
+            <a:spLocks noGrp="1" noRot="1" noChangeAspect="1"/>
+          </p:cNvSpPr>
+          <p:nvPr>
+            <p:ph type="sldImg"/>
+          </p:nvPr>
+        </p:nvSpPr>
+        <p:spPr/>
+      </p:sp>
+      <p:sp>
+        <p:nvSpPr>
+          <p:cNvPr id="3" name="Notes Placeholder 2"/>
+          <p:cNvSpPr>
+            <a:spLocks noGrp="1"/>
+          </p:cNvSpPr>
+          <p:nvPr>
+            <p:ph type="body" idx="1"/>
+          </p:nvPr>
+        </p:nvSpPr>
+        <p:spPr/>
+        <p:txBody>
+          <a:bodyPr/>
+          <a:lstStyle/>
+          <a:p>
+            <a:r>
+              <a:rPr lang="en-US" dirty="0"/>
+              <a:t/>
+            </a:r>
+            <a:endParaRPr lang="en-US" dirty="0"/>
+          </a:p>
+        </p:txBody>
+      </p:sp>
+      <p:sp>
+        <p:nvSpPr>
+          <p:cNvPr id="4" name="Slide Number Placeholder 3"/>
+          <p:cNvSpPr>
+            <a:spLocks noGrp="1"/>
+          </p:cNvSpPr>
+          <p:nvPr>
+            <p:ph type="sldNum" sz="quarter" idx="10"/>
+          </p:nvPr>
+        </p:nvSpPr>
+        <p:spPr/>
+        <p:txBody>
+          <a:bodyPr/>
+          <a:lstStyle/>
+          <a:p>
+            <a:fld id="{F7021451-1387-4CA6-816F-3879F97B5CBC}" type="slidenum">
+              <a:rPr lang="en-US"/>
+              <a:t>8</a:t>
             </a:fld>
             <a:endParaRPr lang="en-US"/>
           </a:p>
@@ -1411,7 +1500,7 @@
       </p:grpSpPr>
       <p:pic>
         <p:nvPicPr>
-          <p:cNvPr id="2" name="ocean:environment" descr="/home/user/workspace/audit/repo/assets/environments/env_peacock_map_light.jpg">    </p:cNvPr>
+          <p:cNvPr id="2" name="ocean:environment" descr="/home/user/workspace/audit/repo/output/.cache/env/rooftop-peacock-light-c41deb64da78.jpg">    </p:cNvPr>
           <p:cNvPicPr>
             <a:picLocks noChangeAspect="1"/>
           </p:cNvPicPr>
@@ -1711,8 +1800,8 @@
         </p:nvSpPr>
         <p:spPr>
           <a:xfrm>
-            <a:off x="711200" y="5715000"/>
-            <a:ext cx="10769295" cy="201168"/>
+            <a:off x="711200" y="5537200"/>
+            <a:ext cx="10769295" cy="402336"/>
           </a:xfrm>
           <a:prstGeom prst="rect">
             <a:avLst/>
@@ -1726,7 +1815,7 @@
           <a:p>
             <a:pPr algn="l" indent="0" marL="0">
               <a:lnSpc>
-                <a:spcPts val="1116"/>
+                <a:spcPts val="1300"/>
               </a:lnSpc>
               <a:buNone/>
             </a:pPr>
@@ -1739,7 +1828,27 @@
                 <a:ea typeface="Stack Sans Headline Light" pitchFamily="34" charset="-122"/>
                 <a:cs typeface="Stack Sans Headline Light" pitchFamily="34" charset="-120"/>
               </a:rPr>
-              <a:t>Confidential. For discussion only. Not an offer to sell or a solicitation of an offer to buy any security.</a:t>
+              <a:t>Confidential. For discussion only. Not an offer to sell or a solicitation of an offer to buy any security. Design specimen with illustrative figures and representative images. Do not use for any commercial</a:t>
+            </a:r>
+            <a:endParaRPr lang="en-US" sz="900" dirty="0"/>
+          </a:p>
+          <a:p>
+            <a:pPr algn="l" indent="0" marL="0">
+              <a:lnSpc>
+                <a:spcPts val="1300"/>
+              </a:lnSpc>
+              <a:buNone/>
+            </a:pPr>
+            <a:r>
+              <a:rPr lang="en-US" sz="900" dirty="0">
+                <a:solidFill>
+                  <a:srgbClr val="F3FBF8"/>
+                </a:solidFill>
+                <a:latin typeface="Stack Sans Headline Light" pitchFamily="34" charset="0"/>
+                <a:ea typeface="Stack Sans Headline Light" pitchFamily="34" charset="-122"/>
+                <a:cs typeface="Stack Sans Headline Light" pitchFamily="34" charset="-120"/>
+              </a:rPr>
+              <a:t>purpose.</a:t>
             </a:r>
             <a:endParaRPr lang="en-US" sz="900" dirty="0"/>
           </a:p>
@@ -2708,49 +2817,7 @@
       </p:sp>
       <p:sp>
         <p:nvSpPr>
-          <p:cNvPr id="22" name="ocean:footer"/>
-          <p:cNvSpPr/>
-          <p:nvPr/>
-        </p:nvSpPr>
-        <p:spPr>
-          <a:xfrm>
-            <a:off x="548640" y="6419088"/>
-            <a:ext cx="7315200" cy="182880"/>
-          </a:xfrm>
-          <a:prstGeom prst="rect">
-            <a:avLst/>
-          </a:prstGeom>
-          <a:noFill/>
-          <a:ln/>
-        </p:spPr>
-        <p:txBody>
-          <a:bodyPr wrap="square" lIns="0" tIns="0" rIns="0" bIns="0" rtlCol="0" anchor="t"/>
-          <a:lstStyle/>
-          <a:p>
-            <a:pPr algn="l" indent="0" marL="0">
-              <a:lnSpc>
-                <a:spcPts val="1116"/>
-              </a:lnSpc>
-              <a:buNone/>
-            </a:pPr>
-            <a:r>
-              <a:rPr lang="en-US" sz="900" spc="225" kern="0" dirty="0">
-                <a:solidFill>
-                  <a:srgbClr val="1B4039"/>
-                </a:solidFill>
-                <a:latin typeface="Stack Sans Headline Light" pitchFamily="34" charset="0"/>
-                <a:ea typeface="Stack Sans Headline Light" pitchFamily="34" charset="-122"/>
-                <a:cs typeface="Stack Sans Headline Light" pitchFamily="34" charset="-120"/>
-              </a:rPr>
-              <a:t>OCEAN RCS · CONFIDENTIAL · FOR DISCUSSION ONLY</a:t>
-            </a:r>
-            <a:endParaRPr lang="en-US" sz="900" dirty="0"/>
-          </a:p>
-        </p:txBody>
-      </p:sp>
-      <p:sp>
-        <p:nvSpPr>
-          <p:cNvPr id="23" name="ocean:statement"/>
+          <p:cNvPr id="22" name="ocean:statement"/>
           <p:cNvSpPr/>
           <p:nvPr/>
         </p:nvSpPr>
@@ -2937,7 +3004,7 @@
       </p:sp>
       <p:sp>
         <p:nvSpPr>
-          <p:cNvPr id="24" name="ocean:bottom-line"/>
+          <p:cNvPr id="23" name="ocean:bottom-line"/>
           <p:cNvSpPr/>
           <p:nvPr/>
         </p:nvSpPr>
@@ -3001,7 +3068,7 @@
       </p:sp>
       <p:sp>
         <p:nvSpPr>
-          <p:cNvPr id="25" name="Shape 22"/>
+          <p:cNvPr id="24" name="Shape 21"/>
           <p:cNvSpPr/>
           <p:nvPr/>
         </p:nvSpPr>
@@ -3026,7 +3093,7 @@
       </p:sp>
       <p:sp>
         <p:nvSpPr>
-          <p:cNvPr id="26" name="ocean:label"/>
+          <p:cNvPr id="25" name="ocean:label"/>
           <p:cNvSpPr/>
           <p:nvPr/>
         </p:nvSpPr>
@@ -3068,7 +3135,7 @@
       </p:sp>
       <p:sp>
         <p:nvSpPr>
-          <p:cNvPr id="27" name="ocean:bottom-line"/>
+          <p:cNvPr id="26" name="ocean:bottom-line"/>
           <p:cNvSpPr/>
           <p:nvPr/>
         </p:nvSpPr>
@@ -3105,6 +3172,48 @@
               <a:t>One emphasis device per idea. Never all three on one line.</a:t>
             </a:r>
             <a:endParaRPr lang="en-US" sz="1500" dirty="0"/>
+          </a:p>
+        </p:txBody>
+      </p:sp>
+      <p:sp>
+        <p:nvSpPr>
+          <p:cNvPr id="27" name="ocean:footer"/>
+          <p:cNvSpPr/>
+          <p:nvPr/>
+        </p:nvSpPr>
+        <p:spPr>
+          <a:xfrm>
+            <a:off x="548640" y="6419088"/>
+            <a:ext cx="7315200" cy="182880"/>
+          </a:xfrm>
+          <a:prstGeom prst="rect">
+            <a:avLst/>
+          </a:prstGeom>
+          <a:noFill/>
+          <a:ln/>
+        </p:spPr>
+        <p:txBody>
+          <a:bodyPr wrap="square" lIns="0" tIns="0" rIns="0" bIns="0" rtlCol="0" anchor="t"/>
+          <a:lstStyle/>
+          <a:p>
+            <a:pPr algn="l" indent="0" marL="0">
+              <a:lnSpc>
+                <a:spcPts val="1116"/>
+              </a:lnSpc>
+              <a:buNone/>
+            </a:pPr>
+            <a:r>
+              <a:rPr lang="en-US" sz="900" spc="225" kern="0" dirty="0">
+                <a:solidFill>
+                  <a:srgbClr val="1B4039"/>
+                </a:solidFill>
+                <a:latin typeface="Stack Sans Headline Light" pitchFamily="34" charset="0"/>
+                <a:ea typeface="Stack Sans Headline Light" pitchFamily="34" charset="-122"/>
+                <a:cs typeface="Stack Sans Headline Light" pitchFamily="34" charset="-120"/>
+              </a:rPr>
+              <a:t>OCEAN RCS · CONFIDENTIAL · FOR DISCUSSION ONLY · DESIGN SPECIMEN · DO NOT USE</a:t>
+            </a:r>
+            <a:endParaRPr lang="en-US" sz="900" dirty="0"/>
           </a:p>
         </p:txBody>
       </p:sp>
@@ -3858,49 +3967,7 @@
       </p:sp>
       <p:sp>
         <p:nvSpPr>
-          <p:cNvPr id="23" name="ocean:footer"/>
-          <p:cNvSpPr/>
-          <p:nvPr/>
-        </p:nvSpPr>
-        <p:spPr>
-          <a:xfrm>
-            <a:off x="548640" y="6419088"/>
-            <a:ext cx="7315200" cy="182880"/>
-          </a:xfrm>
-          <a:prstGeom prst="rect">
-            <a:avLst/>
-          </a:prstGeom>
-          <a:noFill/>
-          <a:ln/>
-        </p:spPr>
-        <p:txBody>
-          <a:bodyPr wrap="square" lIns="0" tIns="0" rIns="0" bIns="0" rtlCol="0" anchor="t"/>
-          <a:lstStyle/>
-          <a:p>
-            <a:pPr algn="l" indent="0" marL="0">
-              <a:lnSpc>
-                <a:spcPts val="1116"/>
-              </a:lnSpc>
-              <a:buNone/>
-            </a:pPr>
-            <a:r>
-              <a:rPr lang="en-US" sz="900" spc="225" kern="0" dirty="0">
-                <a:solidFill>
-                  <a:srgbClr val="1B4039"/>
-                </a:solidFill>
-                <a:latin typeface="Stack Sans Headline Light" pitchFamily="34" charset="0"/>
-                <a:ea typeface="Stack Sans Headline Light" pitchFamily="34" charset="-122"/>
-                <a:cs typeface="Stack Sans Headline Light" pitchFamily="34" charset="-120"/>
-              </a:rPr>
-              <a:t>OCEAN RCS · CONFIDENTIAL · FOR DISCUSSION ONLY</a:t>
-            </a:r>
-            <a:endParaRPr lang="en-US" sz="900" dirty="0"/>
-          </a:p>
-        </p:txBody>
-      </p:sp>
-      <p:sp>
-        <p:nvSpPr>
-          <p:cNvPr id="24" name="ocean:frame"/>
+          <p:cNvPr id="23" name="ocean:frame"/>
           <p:cNvSpPr/>
           <p:nvPr/>
         </p:nvSpPr>
@@ -3961,7 +4028,7 @@
       </p:sp>
       <p:sp>
         <p:nvSpPr>
-          <p:cNvPr id="25" name="Shape 22"/>
+          <p:cNvPr id="24" name="Shape 21"/>
           <p:cNvSpPr/>
           <p:nvPr/>
         </p:nvSpPr>
@@ -3986,7 +4053,7 @@
       </p:sp>
       <p:sp>
         <p:nvSpPr>
-          <p:cNvPr id="26" name="ocean:section"/>
+          <p:cNvPr id="25" name="ocean:section"/>
           <p:cNvSpPr/>
           <p:nvPr/>
         </p:nvSpPr>
@@ -4028,7 +4095,7 @@
       </p:sp>
       <p:sp>
         <p:nvSpPr>
-          <p:cNvPr id="27" name="Shape 24"/>
+          <p:cNvPr id="26" name="Shape 23"/>
           <p:cNvSpPr/>
           <p:nvPr/>
         </p:nvSpPr>
@@ -4051,7 +4118,7 @@
       </p:sp>
       <p:sp>
         <p:nvSpPr>
-          <p:cNvPr id="28" name="ocean:body"/>
+          <p:cNvPr id="27" name="ocean:body"/>
           <p:cNvSpPr/>
           <p:nvPr/>
         </p:nvSpPr>
@@ -4093,7 +4160,7 @@
       </p:sp>
       <p:sp>
         <p:nvSpPr>
-          <p:cNvPr id="29" name="Shape 26"/>
+          <p:cNvPr id="28" name="Shape 25"/>
           <p:cNvSpPr/>
           <p:nvPr/>
         </p:nvSpPr>
@@ -4116,7 +4183,7 @@
       </p:sp>
       <p:sp>
         <p:nvSpPr>
-          <p:cNvPr id="30" name="ocean:body"/>
+          <p:cNvPr id="29" name="ocean:body"/>
           <p:cNvSpPr/>
           <p:nvPr/>
         </p:nvSpPr>
@@ -4192,7 +4259,7 @@
       </p:sp>
       <p:sp>
         <p:nvSpPr>
-          <p:cNvPr id="31" name="Shape 28"/>
+          <p:cNvPr id="30" name="Shape 27"/>
           <p:cNvSpPr/>
           <p:nvPr/>
         </p:nvSpPr>
@@ -4215,7 +4282,7 @@
       </p:sp>
       <p:sp>
         <p:nvSpPr>
-          <p:cNvPr id="32" name="ocean:body"/>
+          <p:cNvPr id="31" name="ocean:body"/>
           <p:cNvSpPr/>
           <p:nvPr/>
         </p:nvSpPr>
@@ -4257,7 +4324,7 @@
       </p:sp>
       <p:sp>
         <p:nvSpPr>
-          <p:cNvPr id="33" name="ocean:frame"/>
+          <p:cNvPr id="32" name="ocean:frame"/>
           <p:cNvSpPr/>
           <p:nvPr/>
         </p:nvSpPr>
@@ -4318,7 +4385,7 @@
       </p:sp>
       <p:sp>
         <p:nvSpPr>
-          <p:cNvPr id="34" name="Shape 31"/>
+          <p:cNvPr id="33" name="Shape 30"/>
           <p:cNvSpPr/>
           <p:nvPr/>
         </p:nvSpPr>
@@ -4343,7 +4410,7 @@
       </p:sp>
       <p:sp>
         <p:nvSpPr>
-          <p:cNvPr id="35" name="Shape 32"/>
+          <p:cNvPr id="34" name="Shape 31"/>
           <p:cNvSpPr/>
           <p:nvPr/>
         </p:nvSpPr>
@@ -4368,7 +4435,7 @@
       </p:sp>
       <p:sp>
         <p:nvSpPr>
-          <p:cNvPr id="36" name="ocean:section"/>
+          <p:cNvPr id="35" name="ocean:section"/>
           <p:cNvSpPr/>
           <p:nvPr/>
         </p:nvSpPr>
@@ -4410,7 +4477,7 @@
       </p:sp>
       <p:sp>
         <p:nvSpPr>
-          <p:cNvPr id="37" name="Shape 34"/>
+          <p:cNvPr id="36" name="Shape 33"/>
           <p:cNvSpPr/>
           <p:nvPr/>
         </p:nvSpPr>
@@ -4433,7 +4500,7 @@
       </p:sp>
       <p:sp>
         <p:nvSpPr>
-          <p:cNvPr id="38" name="ocean:body"/>
+          <p:cNvPr id="37" name="ocean:body"/>
           <p:cNvSpPr/>
           <p:nvPr/>
         </p:nvSpPr>
@@ -4509,7 +4576,7 @@
       </p:sp>
       <p:sp>
         <p:nvSpPr>
-          <p:cNvPr id="39" name="Shape 36"/>
+          <p:cNvPr id="38" name="Shape 35"/>
           <p:cNvSpPr/>
           <p:nvPr/>
         </p:nvSpPr>
@@ -4532,7 +4599,7 @@
       </p:sp>
       <p:sp>
         <p:nvSpPr>
-          <p:cNvPr id="40" name="ocean:body"/>
+          <p:cNvPr id="39" name="ocean:body"/>
           <p:cNvSpPr/>
           <p:nvPr/>
         </p:nvSpPr>
@@ -4574,7 +4641,7 @@
       </p:sp>
       <p:sp>
         <p:nvSpPr>
-          <p:cNvPr id="41" name="Shape 38"/>
+          <p:cNvPr id="40" name="Shape 37"/>
           <p:cNvSpPr/>
           <p:nvPr/>
         </p:nvSpPr>
@@ -4597,7 +4664,7 @@
       </p:sp>
       <p:sp>
         <p:nvSpPr>
-          <p:cNvPr id="42" name="ocean:body"/>
+          <p:cNvPr id="41" name="ocean:body"/>
           <p:cNvSpPr/>
           <p:nvPr/>
         </p:nvSpPr>
@@ -4634,6 +4701,48 @@
               <a:t>Readable Letter pages for PDF</a:t>
             </a:r>
             <a:endParaRPr lang="en-US" sz="1500" dirty="0"/>
+          </a:p>
+        </p:txBody>
+      </p:sp>
+      <p:sp>
+        <p:nvSpPr>
+          <p:cNvPr id="42" name="ocean:footer"/>
+          <p:cNvSpPr/>
+          <p:nvPr/>
+        </p:nvSpPr>
+        <p:spPr>
+          <a:xfrm>
+            <a:off x="548640" y="6419088"/>
+            <a:ext cx="7315200" cy="182880"/>
+          </a:xfrm>
+          <a:prstGeom prst="rect">
+            <a:avLst/>
+          </a:prstGeom>
+          <a:noFill/>
+          <a:ln/>
+        </p:spPr>
+        <p:txBody>
+          <a:bodyPr wrap="square" lIns="0" tIns="0" rIns="0" bIns="0" rtlCol="0" anchor="t"/>
+          <a:lstStyle/>
+          <a:p>
+            <a:pPr algn="l" indent="0" marL="0">
+              <a:lnSpc>
+                <a:spcPts val="1116"/>
+              </a:lnSpc>
+              <a:buNone/>
+            </a:pPr>
+            <a:r>
+              <a:rPr lang="en-US" sz="900" spc="225" kern="0" dirty="0">
+                <a:solidFill>
+                  <a:srgbClr val="1B4039"/>
+                </a:solidFill>
+                <a:latin typeface="Stack Sans Headline Light" pitchFamily="34" charset="0"/>
+                <a:ea typeface="Stack Sans Headline Light" pitchFamily="34" charset="-122"/>
+                <a:cs typeface="Stack Sans Headline Light" pitchFamily="34" charset="-120"/>
+              </a:rPr>
+              <a:t>OCEAN RCS · CONFIDENTIAL · FOR DISCUSSION ONLY · DESIGN SPECIMEN · DO NOT USE</a:t>
+            </a:r>
+            <a:endParaRPr lang="en-US" sz="900" dirty="0"/>
           </a:p>
         </p:txBody>
       </p:sp>
@@ -5345,49 +5454,7 @@
       </p:sp>
       <p:sp>
         <p:nvSpPr>
-          <p:cNvPr id="22" name="ocean:footer"/>
-          <p:cNvSpPr/>
-          <p:nvPr/>
-        </p:nvSpPr>
-        <p:spPr>
-          <a:xfrm>
-            <a:off x="548640" y="6419088"/>
-            <a:ext cx="7315200" cy="182880"/>
-          </a:xfrm>
-          <a:prstGeom prst="rect">
-            <a:avLst/>
-          </a:prstGeom>
-          <a:noFill/>
-          <a:ln/>
-        </p:spPr>
-        <p:txBody>
-          <a:bodyPr wrap="square" lIns="0" tIns="0" rIns="0" bIns="0" rtlCol="0" anchor="t"/>
-          <a:lstStyle/>
-          <a:p>
-            <a:pPr algn="l" indent="0" marL="0">
-              <a:lnSpc>
-                <a:spcPts val="1116"/>
-              </a:lnSpc>
-              <a:buNone/>
-            </a:pPr>
-            <a:r>
-              <a:rPr lang="en-US" sz="900" spc="225" kern="0" dirty="0">
-                <a:solidFill>
-                  <a:srgbClr val="102426"/>
-                </a:solidFill>
-                <a:latin typeface="Stack Sans Headline Light" pitchFamily="34" charset="0"/>
-                <a:ea typeface="Stack Sans Headline Light" pitchFamily="34" charset="-122"/>
-                <a:cs typeface="Stack Sans Headline Light" pitchFamily="34" charset="-120"/>
-              </a:rPr>
-              <a:t>OCEAN RCS · CONFIDENTIAL · FOR DISCUSSION ONLY</a:t>
-            </a:r>
-            <a:endParaRPr lang="en-US" sz="900" dirty="0"/>
-          </a:p>
-        </p:txBody>
-      </p:sp>
-      <p:sp>
-        <p:nvSpPr>
-          <p:cNvPr id="23" name="Shape 20"/>
+          <p:cNvPr id="22" name="Shape 19"/>
           <p:cNvSpPr/>
           <p:nvPr/>
         </p:nvSpPr>
@@ -5410,7 +5477,7 @@
       </p:sp>
       <p:sp>
         <p:nvSpPr>
-          <p:cNvPr id="24" name="ocean:section"/>
+          <p:cNvPr id="23" name="ocean:section"/>
           <p:cNvSpPr/>
           <p:nvPr/>
         </p:nvSpPr>
@@ -5452,7 +5519,7 @@
       </p:sp>
       <p:sp>
         <p:nvSpPr>
-          <p:cNvPr id="25" name="ocean:label"/>
+          <p:cNvPr id="24" name="ocean:label"/>
           <p:cNvSpPr/>
           <p:nvPr/>
         </p:nvSpPr>
@@ -5494,7 +5561,7 @@
       </p:sp>
       <p:sp>
         <p:nvSpPr>
-          <p:cNvPr id="26" name="ocean:body"/>
+          <p:cNvPr id="25" name="ocean:body"/>
           <p:cNvSpPr/>
           <p:nvPr/>
         </p:nvSpPr>
@@ -5556,7 +5623,7 @@
       </p:sp>
       <p:sp>
         <p:nvSpPr>
-          <p:cNvPr id="27" name="Shape 24"/>
+          <p:cNvPr id="26" name="Shape 23"/>
           <p:cNvSpPr/>
           <p:nvPr/>
         </p:nvSpPr>
@@ -5579,7 +5646,7 @@
       </p:sp>
       <p:sp>
         <p:nvSpPr>
-          <p:cNvPr id="28" name="ocean:section"/>
+          <p:cNvPr id="27" name="ocean:section"/>
           <p:cNvSpPr/>
           <p:nvPr/>
         </p:nvSpPr>
@@ -5621,7 +5688,7 @@
       </p:sp>
       <p:sp>
         <p:nvSpPr>
-          <p:cNvPr id="29" name="ocean:label"/>
+          <p:cNvPr id="28" name="ocean:label"/>
           <p:cNvSpPr/>
           <p:nvPr/>
         </p:nvSpPr>
@@ -5663,7 +5730,7 @@
       </p:sp>
       <p:sp>
         <p:nvSpPr>
-          <p:cNvPr id="30" name="ocean:body"/>
+          <p:cNvPr id="29" name="ocean:body"/>
           <p:cNvSpPr/>
           <p:nvPr/>
         </p:nvSpPr>
@@ -5725,7 +5792,7 @@
       </p:sp>
       <p:sp>
         <p:nvSpPr>
-          <p:cNvPr id="31" name="Shape 28"/>
+          <p:cNvPr id="30" name="Shape 27"/>
           <p:cNvSpPr/>
           <p:nvPr/>
         </p:nvSpPr>
@@ -5748,7 +5815,7 @@
       </p:sp>
       <p:sp>
         <p:nvSpPr>
-          <p:cNvPr id="32" name="ocean:section"/>
+          <p:cNvPr id="31" name="ocean:section"/>
           <p:cNvSpPr/>
           <p:nvPr/>
         </p:nvSpPr>
@@ -5790,7 +5857,7 @@
       </p:sp>
       <p:sp>
         <p:nvSpPr>
-          <p:cNvPr id="33" name="ocean:label"/>
+          <p:cNvPr id="32" name="ocean:label"/>
           <p:cNvSpPr/>
           <p:nvPr/>
         </p:nvSpPr>
@@ -5832,7 +5899,7 @@
       </p:sp>
       <p:sp>
         <p:nvSpPr>
-          <p:cNvPr id="34" name="ocean:body"/>
+          <p:cNvPr id="33" name="ocean:body"/>
           <p:cNvSpPr/>
           <p:nvPr/>
         </p:nvSpPr>
@@ -5889,6 +5956,48 @@
               <a:t>supplied headshot or none.</a:t>
             </a:r>
             <a:endParaRPr lang="en-US" sz="1300" dirty="0"/>
+          </a:p>
+        </p:txBody>
+      </p:sp>
+      <p:sp>
+        <p:nvSpPr>
+          <p:cNvPr id="34" name="ocean:footer"/>
+          <p:cNvSpPr/>
+          <p:nvPr/>
+        </p:nvSpPr>
+        <p:spPr>
+          <a:xfrm>
+            <a:off x="548640" y="6419088"/>
+            <a:ext cx="7315200" cy="182880"/>
+          </a:xfrm>
+          <a:prstGeom prst="rect">
+            <a:avLst/>
+          </a:prstGeom>
+          <a:noFill/>
+          <a:ln/>
+        </p:spPr>
+        <p:txBody>
+          <a:bodyPr wrap="square" lIns="0" tIns="0" rIns="0" bIns="0" rtlCol="0" anchor="t"/>
+          <a:lstStyle/>
+          <a:p>
+            <a:pPr algn="l" indent="0" marL="0">
+              <a:lnSpc>
+                <a:spcPts val="1116"/>
+              </a:lnSpc>
+              <a:buNone/>
+            </a:pPr>
+            <a:r>
+              <a:rPr lang="en-US" sz="900" spc="225" kern="0" dirty="0">
+                <a:solidFill>
+                  <a:srgbClr val="102426"/>
+                </a:solidFill>
+                <a:latin typeface="Stack Sans Headline Light" pitchFamily="34" charset="0"/>
+                <a:ea typeface="Stack Sans Headline Light" pitchFamily="34" charset="-122"/>
+                <a:cs typeface="Stack Sans Headline Light" pitchFamily="34" charset="-120"/>
+              </a:rPr>
+              <a:t>OCEAN RCS · CONFIDENTIAL · FOR DISCUSSION ONLY · DESIGN SPECIMEN · DO NOT USE</a:t>
+            </a:r>
+            <a:endParaRPr lang="en-US" sz="900" dirty="0"/>
           </a:p>
         </p:txBody>
       </p:sp>
@@ -6547,48 +6656,6 @@
             <a:prstDash val="solid"/>
           </a:ln>
         </p:spPr>
-      </p:sp>
-      <p:sp>
-        <p:nvSpPr>
-          <p:cNvPr id="20" name="ocean:footer"/>
-          <p:cNvSpPr/>
-          <p:nvPr/>
-        </p:nvSpPr>
-        <p:spPr>
-          <a:xfrm>
-            <a:off x="548640" y="6419088"/>
-            <a:ext cx="7315200" cy="182880"/>
-          </a:xfrm>
-          <a:prstGeom prst="rect">
-            <a:avLst/>
-          </a:prstGeom>
-          <a:noFill/>
-          <a:ln/>
-        </p:spPr>
-        <p:txBody>
-          <a:bodyPr wrap="square" lIns="0" tIns="0" rIns="0" bIns="0" rtlCol="0" anchor="t"/>
-          <a:lstStyle/>
-          <a:p>
-            <a:pPr algn="l" indent="0" marL="0">
-              <a:lnSpc>
-                <a:spcPts val="1116"/>
-              </a:lnSpc>
-              <a:buNone/>
-            </a:pPr>
-            <a:r>
-              <a:rPr lang="en-US" sz="900" spc="225" kern="0" dirty="0">
-                <a:solidFill>
-                  <a:srgbClr val="0B1617"/>
-                </a:solidFill>
-                <a:latin typeface="Stack Sans Headline Light" pitchFamily="34" charset="0"/>
-                <a:ea typeface="Stack Sans Headline Light" pitchFamily="34" charset="-122"/>
-                <a:cs typeface="Stack Sans Headline Light" pitchFamily="34" charset="-120"/>
-              </a:rPr>
-              <a:t>OCEAN RCS · CONFIDENTIAL · FOR DISCUSSION ONLY</a:t>
-            </a:r>
-            <a:endParaRPr lang="en-US" sz="900" dirty="0"/>
-          </a:p>
-        </p:txBody>
       </p:sp>
       <p:graphicFrame>
         <p:nvGraphicFramePr>
@@ -7381,6 +7448,48 @@
           </a:graphicData>
         </a:graphic>
       </p:graphicFrame>
+      <p:sp>
+        <p:nvSpPr>
+          <p:cNvPr id="21" name="ocean:footer"/>
+          <p:cNvSpPr/>
+          <p:nvPr/>
+        </p:nvSpPr>
+        <p:spPr>
+          <a:xfrm>
+            <a:off x="548640" y="6419088"/>
+            <a:ext cx="7315200" cy="182880"/>
+          </a:xfrm>
+          <a:prstGeom prst="rect">
+            <a:avLst/>
+          </a:prstGeom>
+          <a:noFill/>
+          <a:ln/>
+        </p:spPr>
+        <p:txBody>
+          <a:bodyPr wrap="square" lIns="0" tIns="0" rIns="0" bIns="0" rtlCol="0" anchor="t"/>
+          <a:lstStyle/>
+          <a:p>
+            <a:pPr algn="l" indent="0" marL="0">
+              <a:lnSpc>
+                <a:spcPts val="1116"/>
+              </a:lnSpc>
+              <a:buNone/>
+            </a:pPr>
+            <a:r>
+              <a:rPr lang="en-US" sz="900" spc="225" kern="0" dirty="0">
+                <a:solidFill>
+                  <a:srgbClr val="0B1617"/>
+                </a:solidFill>
+                <a:latin typeface="Stack Sans Headline Light" pitchFamily="34" charset="0"/>
+                <a:ea typeface="Stack Sans Headline Light" pitchFamily="34" charset="-122"/>
+                <a:cs typeface="Stack Sans Headline Light" pitchFamily="34" charset="-120"/>
+              </a:rPr>
+              <a:t>OCEAN RCS · CONFIDENTIAL · FOR DISCUSSION ONLY · DESIGN SPECIMEN · DO NOT USE</a:t>
+            </a:r>
+            <a:endParaRPr lang="en-US" sz="900" dirty="0"/>
+          </a:p>
+        </p:txBody>
+      </p:sp>
     </p:spTree>
   </p:cSld>
   <p:clrMapOvr>
@@ -7392,6 +7501,148 @@
 <file path=ppt/slides/slide6.xml><?xml version="1.0" encoding="utf-8"?>
 <p:sld xmlns:a="http://schemas.openxmlformats.org/drawingml/2006/main" xmlns:r="http://schemas.openxmlformats.org/officeDocument/2006/relationships" xmlns:p="http://schemas.openxmlformats.org/presentationml/2006/main">
   <p:cSld name="Slide 6">
+    <p:bg>
+      <p:bgPr>
+        <a:solidFill>
+          <a:srgbClr val="D5CCA0"/>
+        </a:solidFill>
+      </p:bgPr>
+    </p:bg>
+    <p:spTree>
+      <p:nvGrpSpPr>
+        <p:cNvPr id="1" name=""/>
+        <p:cNvGrpSpPr/>
+        <p:nvPr/>
+      </p:nvGrpSpPr>
+      <p:grpSpPr>
+        <a:xfrm>
+          <a:off x="0" y="0"/>
+          <a:ext cx="0" cy="0"/>
+          <a:chOff x="0" y="0"/>
+          <a:chExt cx="0" cy="0"/>
+        </a:xfrm>
+      </p:grpSpPr>
+      <p:pic>
+        <p:nvPicPr>
+          <p:cNvPr id="2" name="ocean:environment" descr="/home/user/workspace/audit/repo/assets/environments/env_sprig_map_light_soft.jpg">    </p:cNvPr>
+          <p:cNvPicPr>
+            <a:picLocks noChangeAspect="1"/>
+          </p:cNvPicPr>
+          <p:nvPr/>
+        </p:nvPicPr>
+        <p:blipFill>
+          <a:blip r:embed="rId1"/>
+          <a:stretch>
+            <a:fillRect/>
+          </a:stretch>
+        </p:blipFill>
+        <p:spPr>
+          <a:xfrm>
+            <a:off x="0" y="0"/>
+            <a:ext cx="12191695" cy="6858000"/>
+          </a:xfrm>
+          <a:prstGeom prst="rect">
+            <a:avLst/>
+          </a:prstGeom>
+        </p:spPr>
+      </p:pic>
+      <p:pic>
+        <p:nvPicPr>
+          <p:cNvPr id="3" name="ocean:logo-graphic" descr="/home/user/workspace/audit/repo/assets/logos/png/logo_graphic_sage.png">    </p:cNvPr>
+          <p:cNvPicPr>
+            <a:picLocks noChangeAspect="1"/>
+          </p:cNvPicPr>
+          <p:nvPr/>
+        </p:nvPicPr>
+        <p:blipFill>
+          <a:blip r:embed="rId2"/>
+          <a:stretch>
+            <a:fillRect/>
+          </a:stretch>
+        </p:blipFill>
+        <p:spPr>
+          <a:xfrm>
+            <a:off x="11287455" y="406400"/>
+            <a:ext cx="355600" cy="355600"/>
+          </a:xfrm>
+          <a:prstGeom prst="rect">
+            <a:avLst/>
+          </a:prstGeom>
+        </p:spPr>
+      </p:pic>
+      <p:sp>
+        <p:nvSpPr>
+          <p:cNvPr id="4" name="ocean:quote"/>
+          <p:cNvSpPr/>
+          <p:nvPr/>
+        </p:nvSpPr>
+        <p:spPr>
+          <a:xfrm>
+            <a:off x="548640" y="1645920"/>
+            <a:ext cx="9692640" cy="3840480"/>
+          </a:xfrm>
+          <a:prstGeom prst="rect">
+            <a:avLst/>
+          </a:prstGeom>
+          <a:noFill/>
+          <a:ln/>
+        </p:spPr>
+        <p:txBody>
+          <a:bodyPr wrap="square" lIns="0" tIns="0" rIns="0" bIns="0" rtlCol="0" anchor="t"/>
+          <a:lstStyle/>
+          <a:p>
+            <a:pPr algn="l" indent="0" marL="0">
+              <a:lnSpc>
+                <a:spcPts val="6000"/>
+              </a:lnSpc>
+              <a:buNone/>
+            </a:pPr>
+            <a:r>
+              <a:rPr lang="en-US" sz="5400" spc="-108" kern="0" dirty="0">
+                <a:solidFill>
+                  <a:srgbClr val="618C7C"/>
+                </a:solidFill>
+                <a:latin typeface="Stack Sans Headline Medium" pitchFamily="34" charset="0"/>
+                <a:ea typeface="Stack Sans Headline Medium" pitchFamily="34" charset="-122"/>
+                <a:cs typeface="Stack Sans Headline Medium" pitchFamily="34" charset="-120"/>
+              </a:rPr>
+              <a:t>Steel and sunlight shape</a:t>
+            </a:r>
+            <a:endParaRPr lang="en-US" sz="5400" dirty="0"/>
+          </a:p>
+          <a:p>
+            <a:pPr algn="l" indent="0" marL="0">
+              <a:lnSpc>
+                <a:spcPts val="6000"/>
+              </a:lnSpc>
+              <a:buNone/>
+            </a:pPr>
+            <a:r>
+              <a:rPr lang="en-US" sz="5400" spc="-108" kern="0" dirty="0">
+                <a:solidFill>
+                  <a:srgbClr val="618C7C"/>
+                </a:solidFill>
+                <a:latin typeface="Stack Sans Headline Medium" pitchFamily="34" charset="0"/>
+                <a:ea typeface="Stack Sans Headline Medium" pitchFamily="34" charset="-122"/>
+                <a:cs typeface="Stack Sans Headline Medium" pitchFamily="34" charset="-120"/>
+              </a:rPr>
+              <a:t>tomorrow's world today.</a:t>
+            </a:r>
+            <a:endParaRPr lang="en-US" sz="5400" dirty="0"/>
+          </a:p>
+        </p:txBody>
+      </p:sp>
+    </p:spTree>
+  </p:cSld>
+  <p:clrMapOvr>
+    <a:masterClrMapping/>
+  </p:clrMapOvr>
+</p:sld>
+</file>
+
+<file path=ppt/slides/slide7.xml><?xml version="1.0" encoding="utf-8"?>
+<p:sld xmlns:a="http://schemas.openxmlformats.org/drawingml/2006/main" xmlns:r="http://schemas.openxmlformats.org/officeDocument/2006/relationships" xmlns:p="http://schemas.openxmlformats.org/presentationml/2006/main">
+  <p:cSld name="Slide 7">
     <p:bg>
       <p:bgPr>
         <a:solidFill>
@@ -7722,7 +7973,7 @@
                 <a:ea typeface="Stack Sans Headline Light" pitchFamily="34" charset="-122"/>
                 <a:cs typeface="Stack Sans Headline Light" pitchFamily="34" charset="-120"/>
               </a:rPr>
-              <a:t>OCEAN RCS · CONFIDENTIAL · FOR DISCUSSION ONLY</a:t>
+              <a:t>OCEAN RCS · CONFIDENTIAL · FOR DISCUSSION ONLY · DESIGN SPECIMEN · DO NOT USE</a:t>
             </a:r>
             <a:endParaRPr lang="en-US" sz="900" dirty="0"/>
           </a:p>
@@ -7736,9 +7987,9 @@
 </p:sld>
 </file>
 
-<file path=ppt/slides/slide7.xml><?xml version="1.0" encoding="utf-8"?>
+<file path=ppt/slides/slide8.xml><?xml version="1.0" encoding="utf-8"?>
 <p:sld xmlns:a="http://schemas.openxmlformats.org/drawingml/2006/main" xmlns:r="http://schemas.openxmlformats.org/officeDocument/2006/relationships" xmlns:p="http://schemas.openxmlformats.org/presentationml/2006/main">
-  <p:cSld name="Slide 7">
+  <p:cSld name="Slide 8">
     <p:bg>
       <p:bgPr>
         <a:solidFill>
@@ -7762,7 +8013,7 @@
       </p:grpSpPr>
       <p:pic>
         <p:nvPicPr>
-          <p:cNvPr id="2" name="ocean:environment" descr="/home/user/workspace/audit/repo/assets/environments/env_peacock_map_light.jpg">    </p:cNvPr>
+          <p:cNvPr id="2" name="ocean:environment" descr="/home/user/workspace/audit/repo/output/.cache/env/rooftop-peacock-light-c41deb64da78.jpg">    </p:cNvPr>
           <p:cNvPicPr>
             <a:picLocks noChangeAspect="1"/>
           </p:cNvPicPr>

--- a/output/pptx/ocean-layout-catalog.pptx
+++ b/output/pptx/ocean-layout-catalog.pptx
@@ -7632,6 +7632,48 @@
           </a:p>
         </p:txBody>
       </p:sp>
+      <p:sp>
+        <p:nvSpPr>
+          <p:cNvPr id="6" name="ocean:footer"/>
+          <p:cNvSpPr/>
+          <p:nvPr/>
+        </p:nvSpPr>
+        <p:spPr>
+          <a:xfrm>
+            <a:off x="548640" y="6419088"/>
+            <a:ext cx="7315200" cy="182880"/>
+          </a:xfrm>
+          <a:prstGeom prst="rect">
+            <a:avLst/>
+          </a:prstGeom>
+          <a:noFill/>
+          <a:ln/>
+        </p:spPr>
+        <p:txBody>
+          <a:bodyPr wrap="square" lIns="0" tIns="0" rIns="0" bIns="0" rtlCol="0" anchor="t"/>
+          <a:lstStyle/>
+          <a:p>
+            <a:pPr algn="l" indent="0" marL="0">
+              <a:lnSpc>
+                <a:spcPts val="1116"/>
+              </a:lnSpc>
+              <a:buNone/>
+            </a:pPr>
+            <a:r>
+              <a:rPr lang="en-US" sz="900" spc="225" kern="0" dirty="0">
+                <a:solidFill>
+                  <a:srgbClr val="0B1617"/>
+                </a:solidFill>
+                <a:latin typeface="Stack Sans Headline Light" pitchFamily="34" charset="0"/>
+                <a:ea typeface="Stack Sans Headline Light" pitchFamily="34" charset="-122"/>
+                <a:cs typeface="Stack Sans Headline Light" pitchFamily="34" charset="-120"/>
+              </a:rPr>
+              <a:t>OCEAN RCS · CONFIDENTIAL · FOR DISCUSSION ONLY · DESIGN SPECIMEN · DO NOT USE</a:t>
+            </a:r>
+            <a:endParaRPr lang="en-US" sz="900" dirty="0"/>
+          </a:p>
+        </p:txBody>
+      </p:sp>
     </p:spTree>
   </p:cSld>
   <p:clrMapOvr>

--- a/output/pptx/ocean-layout-catalog.pptx
+++ b/output/pptx/ocean-layout-catalog.pptx
@@ -1696,7 +1696,7 @@
         </p:nvSpPr>
         <p:spPr>
           <a:xfrm>
-            <a:off x="711200" y="3017520"/>
+            <a:off x="711200" y="2761488"/>
             <a:ext cx="10769295" cy="228600"/>
           </a:xfrm>
           <a:prstGeom prst="rect">
